--- a/showcase/presentations/03_dinamika_i_struktura.pptx
+++ b/showcase/presentations/03_dinamika_i_struktura.pptx
@@ -3327,7 +3327,7 @@
               </a:defRPr>
             </a:pPr>
             <a:r>
-              <a:t>06.06.2026</a:t>
+              <a:t>07.06.2026</a:t>
             </a:r>
           </a:p>
         </p:txBody>
@@ -4405,7 +4405,7 @@
       </p:sp>
       <p:pic>
         <p:nvPicPr>
-          <p:cNvPr id="5" name="Picture 4" descr="pres_slide_ee92a8fd83_0_задолженность_раст_т_к_концу_2024_года.png"/>
+          <p:cNvPr id="5" name="Picture 4" descr="pres_slide_2516e0dfdd_0_задолженность_раст_т_к_концу_2024_года.png"/>
           <p:cNvPicPr>
             <a:picLocks noChangeAspect="1"/>
           </p:cNvPicPr>
@@ -4872,7 +4872,7 @@
       </p:sp>
       <p:pic>
         <p:nvPicPr>
-          <p:cNvPr id="5" name="Picture 4" descr="pres_slide_ee92a8fd83_1_накопление_штрафов_ускоряется_во_ii_полу.png"/>
+          <p:cNvPr id="5" name="Picture 4" descr="pres_slide_2516e0dfdd_1_накопление_штрафов_ускоряется_во_ii_полу.png"/>
           <p:cNvPicPr>
             <a:picLocks noChangeAspect="1"/>
           </p:cNvPicPr>
@@ -5339,7 +5339,7 @@
       </p:sp>
       <p:pic>
         <p:nvPicPr>
-          <p:cNvPr id="5" name="Picture 4" descr="pres_slide_ee92a8fd83_2_начисления_уплата_штрафы_остаток_долга.png"/>
+          <p:cNvPr id="5" name="Picture 4" descr="pres_slide_2516e0dfdd_2_начисления_уплата_штрафы_остаток_долга.png"/>
           <p:cNvPicPr>
             <a:picLocks noChangeAspect="1"/>
           </p:cNvPicPr>
